--- a/docs/presentation.pptx
+++ b/docs/presentation.pptx
@@ -240,6 +240,17 @@
             <c:bubble3D val="0"/>
             <c:spPr>
               <a:solidFill>
+                <a:srgbClr val="5A6485"/>
+              </a:solidFill>
+              <a:effectLst/>
+            </c:spPr>
+          </c:dPt>
+          <c:dPt>
+            <c:idx val="4"/>
+            <c:invertIfNegative val="0"/>
+            <c:bubble3D val="0"/>
+            <c:spPr>
+              <a:solidFill>
                 <a:srgbClr val="2A9D8F"/>
               </a:solidFill>
               <a:effectLst/>
@@ -247,9 +258,9 @@
           </c:dPt>
           <c:cat>
             <c:multiLvlStrRef>
-              <c:f>Sheet1!$A$2:$A$5</c:f>
+              <c:f>Sheet1!$A$2:$A$6</c:f>
               <c:multiLvlStrCache>
-                <c:ptCount val="4"/>
+                <c:ptCount val="5"/>
                 <c:lvl>
                   <c:pt idx="0">
                     <c:v>Always guess
@@ -264,7 +275,11 @@
                   </c:pt>
                   <c:pt idx="3">
                     <c:v>Embedding k-NN
-(k=15)</c:v>
+(k=5)</c:v>
+                  </c:pt>
+                  <c:pt idx="4">
+                    <c:v>Linear SVM
+word+char TF-IDF</c:v>
                   </c:pt>
                 </c:lvl>
               </c:multiLvlStrCache>
@@ -272,10 +287,10 @@
           </c:cat>
           <c:val>
             <c:numRef>
-              <c:f>Sheet1!$B$2:$B$5</c:f>
+              <c:f>Sheet1!$B$2:$B$6</c:f>
               <c:numCache>
                 <c:formatCode>General</c:formatCode>
-                <c:ptCount val="4"/>
+                <c:ptCount val="5"/>
                 <c:pt idx="0">
                   <c:v>29.3</c:v>
                 </c:pt>
@@ -286,7 +301,10 @@
                   <c:v>28.4</c:v>
                 </c:pt>
                 <c:pt idx="3">
-                  <c:v>48.4</c:v>
+                  <c:v>58.4</c:v>
+                </c:pt>
+                <c:pt idx="4">
+                  <c:v>60.6</c:v>
                 </c:pt>
               </c:numCache>
             </c:numRef>
@@ -5990,7 +6008,7 @@
                 <a:ea typeface="Cambria" pitchFamily="34" charset="-122"/>
                 <a:cs typeface="Cambria" pitchFamily="34" charset="-120"/>
               </a:rPr>
-              <a:t>48.4%</a:t>
+              <a:t>60.6%</a:t>
             </a:r>
             <a:endParaRPr lang="en-US" sz="4000" dirty="0"/>
           </a:p>
@@ -6029,7 +6047,7 @@
                 <a:ea typeface="Calibri" pitchFamily="34" charset="-122"/>
                 <a:cs typeface="Calibri" pitchFamily="34" charset="-120"/>
               </a:rPr>
-              <a:t>k-NN accuracy</a:t>
+              <a:t>best router accuracy</a:t>
             </a:r>
             <a:endParaRPr lang="en-US" sz="1250" dirty="0"/>
           </a:p>
@@ -6134,7 +6152,7 @@
                 <a:ea typeface="Cambria" pitchFamily="34" charset="-122"/>
                 <a:cs typeface="Cambria" pitchFamily="34" charset="-120"/>
               </a:rPr>
-              <a:t>0.384</a:t>
+              <a:t>0.604</a:t>
             </a:r>
             <a:endParaRPr lang="en-US" sz="4000" dirty="0"/>
           </a:p>

--- a/docs/presentation.pptx
+++ b/docs/presentation.pptx
@@ -304,7 +304,7 @@
                   <c:v>58.4</c:v>
                 </c:pt>
                 <c:pt idx="4">
-                  <c:v>60.6</c:v>
+                  <c:v>64.8</c:v>
                 </c:pt>
               </c:numCache>
             </c:numRef>
@@ -6008,7 +6008,7 @@
                 <a:ea typeface="Cambria" pitchFamily="34" charset="-122"/>
                 <a:cs typeface="Cambria" pitchFamily="34" charset="-120"/>
               </a:rPr>
-              <a:t>60.6%</a:t>
+              <a:t>64.8%</a:t>
             </a:r>
             <a:endParaRPr lang="en-US" sz="4000" dirty="0"/>
           </a:p>
@@ -6152,7 +6152,7 @@
                 <a:ea typeface="Cambria" pitchFamily="34" charset="-122"/>
                 <a:cs typeface="Cambria" pitchFamily="34" charset="-120"/>
               </a:rPr>
-              <a:t>0.604</a:t>
+              <a:t>0.645</a:t>
             </a:r>
             <a:endParaRPr lang="en-US" sz="4000" dirty="0"/>
           </a:p>

--- a/docs/presentation.pptx
+++ b/docs/presentation.pptx
@@ -292,16 +292,16 @@
                 <c:formatCode>General</c:formatCode>
                 <c:ptCount val="5"/>
                 <c:pt idx="0">
-                  <c:v>29.3</c:v>
+                  <c:v>29.2</c:v>
                 </c:pt>
                 <c:pt idx="1">
                   <c:v>27.4</c:v>
                 </c:pt>
                 <c:pt idx="2">
-                  <c:v>28.4</c:v>
+                  <c:v>22</c:v>
                 </c:pt>
                 <c:pt idx="3">
-                  <c:v>58.4</c:v>
+                  <c:v>64.6</c:v>
                 </c:pt>
                 <c:pt idx="4">
                   <c:v>64.8</c:v>
@@ -539,13 +539,13 @@
                 <c:formatCode>General</c:formatCode>
                 <c:ptCount val="3"/>
                 <c:pt idx="0">
-                  <c:v>0.713</c:v>
+                  <c:v>0.739</c:v>
                 </c:pt>
                 <c:pt idx="1">
-                  <c:v>0.728</c:v>
+                  <c:v>0.731</c:v>
                 </c:pt>
                 <c:pt idx="2">
-                  <c:v>0.745</c:v>
+                  <c:v>0.755</c:v>
                 </c:pt>
               </c:numCache>
             </c:numRef>
@@ -622,13 +622,13 @@
                 <c:formatCode>General</c:formatCode>
                 <c:ptCount val="3"/>
                 <c:pt idx="0">
-                  <c:v>0.823</c:v>
+                  <c:v>0.838</c:v>
                 </c:pt>
                 <c:pt idx="1">
-                  <c:v>0.859</c:v>
+                  <c:v>0.851</c:v>
                 </c:pt>
                 <c:pt idx="2">
-                  <c:v>0.844</c:v>
+                  <c:v>0.865</c:v>
                 </c:pt>
               </c:numCache>
             </c:numRef>
@@ -6086,7 +6086,7 @@
                 <a:ea typeface="Calibri" pitchFamily="34" charset="-122"/>
                 <a:cs typeface="Calibri" pitchFamily="34" charset="-120"/>
               </a:rPr>
-              <a:t>vs 29.3% majority</a:t>
+              <a:t>vs 29.2% majority</a:t>
             </a:r>
             <a:endParaRPr lang="en-US" sz="1050" dirty="0"/>
           </a:p>
@@ -6335,7 +6335,7 @@
                 <a:ea typeface="Calibri" pitchFamily="34" charset="-122"/>
                 <a:cs typeface="Calibri" pitchFamily="34" charset="-120"/>
               </a:rPr>
-              <a:t>27.4% accuracy is below the 29.3% you get by answering "Technical Support" every time. The rules do carry signal — macro-F1 0.208 against 0.045 — but on raw accuracy they are worse than a constant. This is why we report both metrics.</a:t>
+              <a:t>27.4% accuracy is below the 29.2% you get by answering "Technical Support" every time. The rules do carry signal — macro-F1 0.208 against 0.045 — but on raw accuracy they are worse than a constant. This is why we report both metrics.</a:t>
             </a:r>
             <a:endParaRPr lang="en-US" sz="1100" dirty="0"/>
           </a:p>

--- a/docs/presentation.pptx
+++ b/docs/presentation.pptx
@@ -292,19 +292,19 @@
                 <c:formatCode>General</c:formatCode>
                 <c:ptCount val="5"/>
                 <c:pt idx="0">
-                  <c:v>29.2</c:v>
+                  <c:v>29.4</c:v>
                 </c:pt>
                 <c:pt idx="1">
-                  <c:v>27.4</c:v>
+                  <c:v>29.4</c:v>
                 </c:pt>
                 <c:pt idx="2">
-                  <c:v>22</c:v>
+                  <c:v>26.5</c:v>
                 </c:pt>
                 <c:pt idx="3">
-                  <c:v>64.6</c:v>
+                  <c:v>43.8</c:v>
                 </c:pt>
                 <c:pt idx="4">
-                  <c:v>64.8</c:v>
+                  <c:v>52.3</c:v>
                 </c:pt>
               </c:numCache>
             </c:numRef>
@@ -539,13 +539,13 @@
                 <c:formatCode>General</c:formatCode>
                 <c:ptCount val="3"/>
                 <c:pt idx="0">
-                  <c:v>0.739</c:v>
+                  <c:v>0.582</c:v>
                 </c:pt>
                 <c:pt idx="1">
-                  <c:v>0.731</c:v>
+                  <c:v>0.606</c:v>
                 </c:pt>
                 <c:pt idx="2">
-                  <c:v>0.755</c:v>
+                  <c:v>0.602</c:v>
                 </c:pt>
               </c:numCache>
             </c:numRef>
@@ -622,13 +622,13 @@
                 <c:formatCode>General</c:formatCode>
                 <c:ptCount val="3"/>
                 <c:pt idx="0">
-                  <c:v>0.838</c:v>
+                  <c:v>0.758</c:v>
                 </c:pt>
                 <c:pt idx="1">
-                  <c:v>0.851</c:v>
+                  <c:v>0.771</c:v>
                 </c:pt>
                 <c:pt idx="2">
-                  <c:v>0.865</c:v>
+                  <c:v>0.766</c:v>
                 </c:pt>
               </c:numCache>
             </c:numRef>
@@ -908,7 +908,7 @@
                     <c:v>Product Support</c:v>
                   </c:pt>
                   <c:pt idx="5">
-                    <c:v>Returns and Exchanges</c:v>
+                    <c:v>Customer Service</c:v>
                   </c:pt>
                 </c:lvl>
               </c:multiLvlStrCache>
@@ -921,22 +921,22 @@
                 <c:formatCode>General</c:formatCode>
                 <c:ptCount val="6"/>
                 <c:pt idx="0">
-                  <c:v>71</c:v>
+                  <c:v>77.6</c:v>
                 </c:pt>
                 <c:pt idx="1">
-                  <c:v>58.6</c:v>
+                  <c:v>58.7</c:v>
                 </c:pt>
                 <c:pt idx="2">
-                  <c:v>48.8</c:v>
+                  <c:v>43.3</c:v>
                 </c:pt>
                 <c:pt idx="3">
-                  <c:v>30.6</c:v>
+                  <c:v>30.9</c:v>
                 </c:pt>
                 <c:pt idx="4">
-                  <c:v>29.6</c:v>
+                  <c:v>29.3</c:v>
                 </c:pt>
                 <c:pt idx="5">
-                  <c:v>21.4</c:v>
+                  <c:v>19.5</c:v>
                 </c:pt>
               </c:numCache>
             </c:numRef>
@@ -2099,7 +2099,7 @@
           <a:p>
             <a:r>
               <a:rPr lang="en-US" dirty="0"/>
-              <a:t>Being explicit about what was not executed is worth more marks than pretending otherwise, and it is the honest answer if an examiner asks 'did you actually run this end to end on the cluster'.</a:t>
+              <a:t>Being explicit about what was and was not verified is worth more marks than glossing over it, and it is the honest answer if an examiner asks 'did you actually run this end to end on the cluster'.</a:t>
             </a:r>
             <a:endParaRPr lang="en-US" dirty="0"/>
           </a:p>
@@ -6008,7 +6008,7 @@
                 <a:ea typeface="Cambria" pitchFamily="34" charset="-122"/>
                 <a:cs typeface="Cambria" pitchFamily="34" charset="-120"/>
               </a:rPr>
-              <a:t>64.8%</a:t>
+              <a:t>52.3%</a:t>
             </a:r>
             <a:endParaRPr lang="en-US" sz="4000" dirty="0"/>
           </a:p>
@@ -6086,7 +6086,7 @@
                 <a:ea typeface="Calibri" pitchFamily="34" charset="-122"/>
                 <a:cs typeface="Calibri" pitchFamily="34" charset="-120"/>
               </a:rPr>
-              <a:t>vs 29.2% majority</a:t>
+              <a:t>vs 29.4% majority</a:t>
             </a:r>
             <a:endParaRPr lang="en-US" sz="1050" dirty="0"/>
           </a:p>
@@ -6152,7 +6152,7 @@
                 <a:ea typeface="Cambria" pitchFamily="34" charset="-122"/>
                 <a:cs typeface="Cambria" pitchFamily="34" charset="-120"/>
               </a:rPr>
-              <a:t>0.645</a:t>
+              <a:t>0.464</a:t>
             </a:r>
             <a:endParaRPr lang="en-US" sz="4000" dirty="0"/>
           </a:p>
@@ -6335,7 +6335,7 @@
                 <a:ea typeface="Calibri" pitchFamily="34" charset="-122"/>
                 <a:cs typeface="Calibri" pitchFamily="34" charset="-120"/>
               </a:rPr>
-              <a:t>27.4% accuracy is below the 29.2% you get by answering "Technical Support" every time. The rules do carry signal — macro-F1 0.208 against 0.045 — but on raw accuracy they are worse than a constant. This is why we report both metrics.</a:t>
+              <a:t>29.4% accuracy is below the 29.4% you get by answering "Technical Support" every time. The rules do carry signal — macro-F1 0.247 against 0.045 — but on raw accuracy they are worse than a constant. This is why we report both metrics.</a:t>
             </a:r>
             <a:endParaRPr lang="en-US" sz="1100" dirty="0"/>
           </a:p>
@@ -6859,7 +6859,7 @@
                 <a:ea typeface="Calibri" pitchFamily="34" charset="-122"/>
                 <a:cs typeface="Calibri" pitchFamily="34" charset="-120"/>
               </a:rPr>
-              <a:t>Tickets labelled de are wrong 27.2% of the time.</a:t>
+              <a:t>Tickets labelled de are wrong 24.5% of the time.</a:t>
             </a:r>
             <a:endParaRPr lang="en-US" sz="1150" dirty="0"/>
           </a:p>
@@ -6879,7 +6879,7 @@
                 <a:ea typeface="Calibri" pitchFamily="34" charset="-122"/>
                 <a:cs typeface="Calibri" pitchFamily="34" charset="-120"/>
               </a:rPr>
-              <a:t>Tickets labelled en are wrong 0.05% of the time.</a:t>
+              <a:t>Tickets labelled en are wrong 0.00% of the time.</a:t>
             </a:r>
             <a:endParaRPr lang="en-US" sz="1150" dirty="0"/>
           </a:p>
@@ -6899,7 +6899,7 @@
                 <a:ea typeface="Calibri" pitchFamily="34" charset="-122"/>
                 <a:cs typeface="Calibri" pitchFamily="34" charset="-120"/>
               </a:rPr>
-              <a:t>The 11.7% headline rate hides a one-directional defect: more than a quarter of the "German" corpus is English text.</a:t>
+              <a:t>The 8.9% headline rate hides a one-directional defect: more than a quarter of the "German" corpus is English text.</a:t>
             </a:r>
             <a:endParaRPr lang="en-US" sz="1150" dirty="0"/>
           </a:p>
@@ -7007,7 +7007,7 @@
                 <a:ea typeface="Calibri" pitchFamily="34" charset="-122"/>
                 <a:cs typeface="Calibri" pitchFamily="34" charset="-120"/>
               </a:rPr>
-              <a:t>Service Outages is 4.0% of volume but 71.0% high priority.</a:t>
+              <a:t>Service Outages is 4.0% of volume but 77.6% high priority.</a:t>
             </a:r>
             <a:endParaRPr lang="en-US" sz="1150" dirty="0"/>
           </a:p>
@@ -7027,7 +7027,7 @@
                 <a:ea typeface="Calibri" pitchFamily="34" charset="-122"/>
                 <a:cs typeface="Calibri" pitchFamily="34" charset="-120"/>
               </a:rPr>
-              <a:t>Human Resources is 9.5%.</a:t>
+              <a:t>Human Resources is 17.7%.</a:t>
             </a:r>
             <a:endParaRPr lang="en-US" sz="1150" dirty="0"/>
           </a:p>
@@ -7695,7 +7695,7 @@
                 <a:ea typeface="Calibri" pitchFamily="34" charset="-122"/>
                 <a:cs typeface="Calibri" pitchFamily="34" charset="-120"/>
               </a:rPr>
-              <a:t>80 unit tests pass and the pipeline ran end to end over all 28,587 rows. The Docker stack, the Spark jobs and the neural backend were not executed in the build environment — documented in the README.</a:t>
+              <a:t>80 unit tests pass and the pipeline ran end to end over all 28,587 rows. The Docker stack, the Spark jobs and the Elasticsearch writes have since been run and verified against the live stack — see docs/DEMO.md.</a:t>
             </a:r>
             <a:endParaRPr lang="en-US" sz="1050" dirty="0"/>
           </a:p>

--- a/docs/presentation.pptx
+++ b/docs/presentation.pptx
@@ -292,19 +292,19 @@
                 <c:formatCode>General</c:formatCode>
                 <c:ptCount val="5"/>
                 <c:pt idx="0">
-                  <c:v>29.4</c:v>
+                  <c:v>29.3</c:v>
                 </c:pt>
                 <c:pt idx="1">
-                  <c:v>29.4</c:v>
+                  <c:v>27.4</c:v>
                 </c:pt>
                 <c:pt idx="2">
-                  <c:v>26.5</c:v>
+                  <c:v>22</c:v>
                 </c:pt>
                 <c:pt idx="3">
-                  <c:v>43.8</c:v>
+                  <c:v>64.6</c:v>
                 </c:pt>
                 <c:pt idx="4">
-                  <c:v>52.3</c:v>
+                  <c:v>64.8</c:v>
                 </c:pt>
               </c:numCache>
             </c:numRef>
@@ -539,13 +539,13 @@
                 <c:formatCode>General</c:formatCode>
                 <c:ptCount val="3"/>
                 <c:pt idx="0">
-                  <c:v>0.582</c:v>
+                  <c:v>0.744</c:v>
                 </c:pt>
                 <c:pt idx="1">
-                  <c:v>0.606</c:v>
+                  <c:v>0.728</c:v>
                 </c:pt>
                 <c:pt idx="2">
-                  <c:v>0.602</c:v>
+                  <c:v>0.758</c:v>
                 </c:pt>
               </c:numCache>
             </c:numRef>
@@ -622,13 +622,13 @@
                 <c:formatCode>General</c:formatCode>
                 <c:ptCount val="3"/>
                 <c:pt idx="0">
-                  <c:v>0.758</c:v>
+                  <c:v>0.835</c:v>
                 </c:pt>
                 <c:pt idx="1">
-                  <c:v>0.771</c:v>
+                  <c:v>0.859</c:v>
                 </c:pt>
                 <c:pt idx="2">
-                  <c:v>0.766</c:v>
+                  <c:v>0.876</c:v>
                 </c:pt>
               </c:numCache>
             </c:numRef>
@@ -908,7 +908,7 @@
                     <c:v>Product Support</c:v>
                   </c:pt>
                   <c:pt idx="5">
-                    <c:v>Customer Service</c:v>
+                    <c:v>Returns and Exchanges</c:v>
                   </c:pt>
                 </c:lvl>
               </c:multiLvlStrCache>
@@ -921,22 +921,22 @@
                 <c:formatCode>General</c:formatCode>
                 <c:ptCount val="6"/>
                 <c:pt idx="0">
-                  <c:v>77.6</c:v>
+                  <c:v>71</c:v>
                 </c:pt>
                 <c:pt idx="1">
-                  <c:v>58.7</c:v>
+                  <c:v>58.6</c:v>
                 </c:pt>
                 <c:pt idx="2">
-                  <c:v>43.3</c:v>
+                  <c:v>48.8</c:v>
                 </c:pt>
                 <c:pt idx="3">
-                  <c:v>30.9</c:v>
+                  <c:v>30.6</c:v>
                 </c:pt>
                 <c:pt idx="4">
-                  <c:v>29.3</c:v>
+                  <c:v>29.6</c:v>
                 </c:pt>
                 <c:pt idx="5">
-                  <c:v>19.5</c:v>
+                  <c:v>21.4</c:v>
                 </c:pt>
               </c:numCache>
             </c:numRef>
@@ -1923,7 +1923,7 @@
           <a:p>
             <a:r>
               <a:rPr lang="en-US" dirty="0"/>
-              <a:t>Do not skip this slide. It is the one that shows understanding rather than just a working system. The honest position is: our design predicted semantic would win, it did not under the backend we could actually run, and we can explain exactly why. Reproducing the neural comparison is one environment variable — EMBEDDING_BACKEND=sentence-transformers — and one pipeline re-run.</a:t>
+              <a:t>Do not skip this slide. It is the one that shows understanding rather than just a working system. The honest position is: our design predicted semantic would win, it did not under the backend we could actually run, and we can explain exactly why. Reproducing the neural comparison is one environment variable — EMBEDDING_BACKEND=sentence-transformers — and one pipeline re-run. On the cross-lingual result: the first probe we wrote was unfair by construction (mixed-language pool, dominated by the 12,249 German tickets), we caught that ourselves, fixed it with a language-filtered evaluation, and the corrected number is a real positive result, not just a caveat.</a:t>
             </a:r>
             <a:endParaRPr lang="en-US" dirty="0"/>
           </a:p>
@@ -4566,27 +4566,7 @@
                 <a:ea typeface="Calibri" pitchFamily="34" charset="-122"/>
                 <a:cs typeface="Calibri" pitchFamily="34" charset="-120"/>
               </a:rPr>
-              <a:t>Kibana dashboards</a:t>
-            </a:r>
-            <a:endParaRPr lang="en-US" sz="950" dirty="0"/>
-          </a:p>
-          <a:p>
-            <a:pPr indent="0" marL="0">
-              <a:lnSpc>
-                <a:spcPts val="1300"/>
-              </a:lnSpc>
-              <a:buNone/>
-            </a:pPr>
-            <a:r>
-              <a:rPr lang="en-US" sz="950" dirty="0">
-                <a:solidFill>
-                  <a:srgbClr val="FFFFFF"/>
-                </a:solidFill>
-                <a:latin typeface="Calibri" pitchFamily="34" charset="0"/>
-                <a:ea typeface="Calibri" pitchFamily="34" charset="-122"/>
-                <a:cs typeface="Calibri" pitchFamily="34" charset="-120"/>
-              </a:rPr>
-              <a:t>FastAPI /search /ask /route</a:t>
+              <a:t>FastAPI /search /ask /route /kpis</a:t>
             </a:r>
             <a:endParaRPr lang="en-US" sz="950" dirty="0"/>
           </a:p>
@@ -6008,7 +5988,7 @@
                 <a:ea typeface="Cambria" pitchFamily="34" charset="-122"/>
                 <a:cs typeface="Cambria" pitchFamily="34" charset="-120"/>
               </a:rPr>
-              <a:t>52.3%</a:t>
+              <a:t>64.8%</a:t>
             </a:r>
             <a:endParaRPr lang="en-US" sz="4000" dirty="0"/>
           </a:p>
@@ -6086,7 +6066,7 @@
                 <a:ea typeface="Calibri" pitchFamily="34" charset="-122"/>
                 <a:cs typeface="Calibri" pitchFamily="34" charset="-120"/>
               </a:rPr>
-              <a:t>vs 29.4% majority</a:t>
+              <a:t>vs 29.3% majority</a:t>
             </a:r>
             <a:endParaRPr lang="en-US" sz="1050" dirty="0"/>
           </a:p>
@@ -6152,7 +6132,7 @@
                 <a:ea typeface="Cambria" pitchFamily="34" charset="-122"/>
                 <a:cs typeface="Cambria" pitchFamily="34" charset="-120"/>
               </a:rPr>
-              <a:t>0.464</a:t>
+              <a:t>0.645</a:t>
             </a:r>
             <a:endParaRPr lang="en-US" sz="4000" dirty="0"/>
           </a:p>
@@ -6335,7 +6315,7 @@
                 <a:ea typeface="Calibri" pitchFamily="34" charset="-122"/>
                 <a:cs typeface="Calibri" pitchFamily="34" charset="-120"/>
               </a:rPr>
-              <a:t>29.4% accuracy is below the 29.4% you get by answering "Technical Support" every time. The rules do carry signal — macro-F1 0.247 against 0.045 — but on raw accuracy they are worse than a constant. This is why we report both metrics.</a:t>
+              <a:t>27.4% accuracy is below the 29.3% you get by answering "Technical Support" every time. The rules do carry signal — macro-F1 0.208 against 0.045 — but on raw accuracy they are worse than a constant. This is why we report both metrics.</a:t>
             </a:r>
             <a:endParaRPr lang="en-US" sz="1100" dirty="0"/>
           </a:p>
@@ -6582,7 +6562,7 @@
                 <a:ea typeface="Calibri" pitchFamily="34" charset="-122"/>
                 <a:cs typeface="Calibri" pitchFamily="34" charset="-120"/>
               </a:rPr>
-              <a:t>The cross-lingual probe makes the point sharply: a German query retrieves ~0 relevant English tickets, because LSA shares no space across languages.</a:t>
+              <a:t>The unrestricted cross-lingual probe makes the point sharply: a German query's top-5 is dominated by German tickets on volume alone (12,249 of them) before cross-lingual ability gets a chance to show — that is a flaw in the probe, not the model.</a:t>
             </a:r>
             <a:endParaRPr lang="en-US" sz="1150" dirty="0"/>
           </a:p>
@@ -6602,7 +6582,7 @@
                 <a:ea typeface="Calibri" pitchFamily="34" charset="-122"/>
                 <a:cs typeface="Calibri" pitchFamily="34" charset="-120"/>
               </a:rPr>
-              <a:t>The multilingual neural model is expected to change both results. We have not measured it, so we do not claim it.</a:t>
+              <a:t>We fixed the probe: restrict the candidate pool to the other language before ranking, then score with the same relevance proxy, on the full 28,587-ticket corpus. Semantic beats keyword by 2.5 points of precision@5 (0.685 vs. 0.660) — wider than the 1.6-point gap in same-pool retrieval, because BM25 cannot match German query terms against English text at all. (A first pass on a 5,000-ticket sample showed an 11.5-point gap — right direction, overstated by sample size.)</a:t>
             </a:r>
             <a:endParaRPr lang="en-US" sz="1150" dirty="0"/>
           </a:p>
@@ -6859,7 +6839,7 @@
                 <a:ea typeface="Calibri" pitchFamily="34" charset="-122"/>
                 <a:cs typeface="Calibri" pitchFamily="34" charset="-120"/>
               </a:rPr>
-              <a:t>Tickets labelled de are wrong 24.5% of the time.</a:t>
+              <a:t>Tickets labelled de are wrong 27.2% of the time.</a:t>
             </a:r>
             <a:endParaRPr lang="en-US" sz="1150" dirty="0"/>
           </a:p>
@@ -6879,7 +6859,7 @@
                 <a:ea typeface="Calibri" pitchFamily="34" charset="-122"/>
                 <a:cs typeface="Calibri" pitchFamily="34" charset="-120"/>
               </a:rPr>
-              <a:t>Tickets labelled en are wrong 0.00% of the time.</a:t>
+              <a:t>Tickets labelled en are wrong 0.05% of the time.</a:t>
             </a:r>
             <a:endParaRPr lang="en-US" sz="1150" dirty="0"/>
           </a:p>
@@ -6899,7 +6879,7 @@
                 <a:ea typeface="Calibri" pitchFamily="34" charset="-122"/>
                 <a:cs typeface="Calibri" pitchFamily="34" charset="-120"/>
               </a:rPr>
-              <a:t>The 8.9% headline rate hides a one-directional defect: more than a quarter of the "German" corpus is English text.</a:t>
+              <a:t>The 11.7% headline rate hides a one-directional defect: more than a quarter of the "German" corpus is English text.</a:t>
             </a:r>
             <a:endParaRPr lang="en-US" sz="1150" dirty="0"/>
           </a:p>
@@ -7007,7 +6987,7 @@
                 <a:ea typeface="Calibri" pitchFamily="34" charset="-122"/>
                 <a:cs typeface="Calibri" pitchFamily="34" charset="-120"/>
               </a:rPr>
-              <a:t>Service Outages is 4.0% of volume but 77.6% high priority.</a:t>
+              <a:t>Service Outages is 4.0% of volume but 71.0% high priority.</a:t>
             </a:r>
             <a:endParaRPr lang="en-US" sz="1150" dirty="0"/>
           </a:p>
@@ -7027,7 +7007,7 @@
                 <a:ea typeface="Calibri" pitchFamily="34" charset="-122"/>
                 <a:cs typeface="Calibri" pitchFamily="34" charset="-120"/>
               </a:rPr>
-              <a:t>Human Resources is 17.7%.</a:t>
+              <a:t>Human Resources is 9.5%.</a:t>
             </a:r>
             <a:endParaRPr lang="en-US" sz="1150" dirty="0"/>
           </a:p>
@@ -7251,7 +7231,7 @@
                 <a:ea typeface="Calibri" pitchFamily="34" charset="-122"/>
                 <a:cs typeface="Calibri" pitchFamily="34" charset="-120"/>
               </a:rPr>
-              <a:t>Every transformation is a pure function; UDFs call them. This is what makes 80 unit tests meaningful and lets the whole pipeline run without Spark. Cost: a second native implementation of the KPIs, cross-checked automatically.</a:t>
+              <a:t>Every transformation is a pure function; UDFs call them. This is what makes 87 unit tests meaningful and lets the whole pipeline run without Spark. Cost: a second native implementation of the KPIs, cross-checked automatically.</a:t>
             </a:r>
             <a:endParaRPr lang="en-US" sz="1100" dirty="0"/>
           </a:p>
@@ -7695,7 +7675,7 @@
                 <a:ea typeface="Calibri" pitchFamily="34" charset="-122"/>
                 <a:cs typeface="Calibri" pitchFamily="34" charset="-120"/>
               </a:rPr>
-              <a:t>80 unit tests pass and the pipeline ran end to end over all 28,587 rows. The Docker stack, the Spark jobs and the Elasticsearch writes have since been run and verified against the live stack — see docs/DEMO.md.</a:t>
+              <a:t>87 unit tests pass and the pipeline ran end to end over all 28,587 rows. The Docker stack, the Spark jobs and the Elasticsearch writes have since been run and verified against the live stack — see docs/DEMO.md.</a:t>
             </a:r>
             <a:endParaRPr lang="en-US" sz="1050" dirty="0"/>
           </a:p>
@@ -7805,7 +7785,7 @@
                 <a:ea typeface="Calibri" pitchFamily="34" charset="-122"/>
                 <a:cs typeface="Calibri" pitchFamily="34" charset="-120"/>
               </a:rPr>
-              <a:t>GET /compare?q=…</a:t>
+              <a:t>GET /compare?q=security incident</a:t>
             </a:r>
             <a:endParaRPr lang="en-US" sz="1500" dirty="0"/>
           </a:p>
@@ -7844,7 +7824,7 @@
                 <a:ea typeface="Calibri" pitchFamily="34" charset="-122"/>
                 <a:cs typeface="Calibri" pitchFamily="34" charset="-120"/>
               </a:rPr>
-              <a:t>One query, three rankings side by side — semantic, BM25 and hybrid. The clearest way to see what each retrieval mode actually does.</a:t>
+              <a:t>Keyword surfaces a German ticket on a coincidental word match; semantic finds the right English ticket sharing no words at all with the query.</a:t>
             </a:r>
             <a:endParaRPr lang="en-US" sz="1250" dirty="0"/>
           </a:p>
@@ -7922,7 +7902,7 @@
                 <a:ea typeface="Calibri" pitchFamily="34" charset="-122"/>
                 <a:cs typeface="Calibri" pitchFamily="34" charset="-120"/>
               </a:rPr>
-              <a:t>Paste an unseen ticket. Returns the rule-based guess and the k-NN guess with its nearest neighbours, so the improvement is visible per request.</a:t>
+              <a:t>Text: "I was charged twice for the same order and need a refund." k-NN returns Technical Support at 33% confidence (5 of 15 votes) — a live look at how confidence is actually computed.</a:t>
             </a:r>
             <a:endParaRPr lang="en-US" sz="1250" dirty="0"/>
           </a:p>
@@ -8000,7 +7980,7 @@
                 <a:ea typeface="Calibri" pitchFamily="34" charset="-122"/>
                 <a:cs typeface="Calibri" pitchFamily="34" charset="-120"/>
               </a:rPr>
-              <a:t>RAG over the corpus. Answers only from retrieved tickets; invented citations are stripped before you see them.</a:t>
+              <a:t>"What security incidents have been reported?" — answered only from retrieved tickets; invented citations are stripped before you see them.</a:t>
             </a:r>
             <a:endParaRPr lang="en-US" sz="1250" dirty="0"/>
           </a:p>
@@ -8039,7 +8019,7 @@
                 <a:ea typeface="Calibri" pitchFamily="34" charset="-122"/>
                 <a:cs typeface="Calibri" pitchFamily="34" charset="-120"/>
               </a:rPr>
-              <a:t>Kibana</a:t>
+              <a:t>GET /kpis</a:t>
             </a:r>
             <a:endParaRPr lang="en-US" sz="1500" dirty="0"/>
           </a:p>
@@ -8078,7 +8058,7 @@
                 <a:ea typeface="Calibri" pitchFamily="34" charset="-122"/>
                 <a:cs typeface="Calibri" pitchFamily="34" charset="-120"/>
               </a:rPr>
-              <a:t>KPI dashboards over the gold layer — queue volumes, sentiment, high-priority concentration.</a:t>
+              <a:t>Computed aggregates over the gold layer — queue volumes, sentiment, high-priority concentration — served straight from output/kpis.json or Elasticsearch.</a:t>
             </a:r>
             <a:endParaRPr lang="en-US" sz="1250" dirty="0"/>
           </a:p>

--- a/docs/presentation.pptx
+++ b/docs/presentation.pptx
@@ -1747,7 +1747,7 @@
           <a:p>
             <a:r>
               <a:rPr lang="en-US" dirty="0"/>
-              <a:t>The point about two backends is robustness: with LLM_PROVIDER=none and no model weights the pipeline still produces every number in this deck. That is deliberate — the demo cannot be broken by a failed download. On guardrails: asking a model to cite only what it was given is a prompt, not a guarantee, so we post-check every citation and strip the invented ones.</a:t>
+              <a:t>The point about two backends is robustness: with LLM_PROVIDER=none and no model weights the pipeline still produces every number in this deck. That is deliberate — the demo cannot be broken by a failed download. On guardrails: asking a model to cite only what it was given is a prompt, not a guarantee, so we post-check every citation and strip the invented ones. If asked about a fourth option: ai/llm.py also implements LLM-based enrichment (option a) against a real provider, but it was never exercised — every run reported here used LLM_PROVIDER=none, so it took the rule-based fallback, not a live model. The code exists; the capability was never actually run, so it isn't claimed as one of the three.</a:t>
             </a:r>
             <a:endParaRPr lang="en-US" dirty="0"/>
           </a:p>
@@ -4926,7 +4926,7 @@
                 <a:ea typeface="Calibri" pitchFamily="34" charset="-122"/>
                 <a:cs typeface="Calibri" pitchFamily="34" charset="-120"/>
               </a:rPr>
-              <a:t>Four of the brief's options; embeddings + semantic search is the centrepiece</a:t>
+              <a:t>Three of the brief's options; embeddings + semantic search is the centrepiece</a:t>
             </a:r>
             <a:endParaRPr lang="en-US" sz="1400" dirty="0"/>
           </a:p>
@@ -5366,11 +5366,13 @@
         </p:nvSpPr>
         <p:spPr>
           <a:xfrm>
-            <a:off x="548640" y="4087368"/>
-            <a:ext cx="457200" cy="457200"/>
-          </a:xfrm>
-          <a:prstGeom prst="ellipse">
-            <a:avLst/>
+            <a:off x="7498080" y="1783080"/>
+            <a:ext cx="4114800" cy="2286000"/>
+          </a:xfrm>
+          <a:prstGeom prst="roundRect">
+            <a:avLst>
+              <a:gd name="adj" fmla="val 3200"/>
+            </a:avLst>
           </a:prstGeom>
           <a:solidFill>
             <a:srgbClr val="1E2761"/>
@@ -5391,150 +5393,6 @@
         </p:nvSpPr>
         <p:spPr>
           <a:xfrm>
-            <a:off x="548640" y="4087368"/>
-            <a:ext cx="457200" cy="457200"/>
-          </a:xfrm>
-          <a:prstGeom prst="rect">
-            <a:avLst/>
-          </a:prstGeom>
-          <a:noFill/>
-          <a:ln/>
-        </p:spPr>
-        <p:txBody>
-          <a:bodyPr wrap="square" lIns="0" tIns="0" rIns="0" bIns="0" rtlCol="0" anchor="ctr"/>
-          <a:lstStyle/>
-          <a:p>
-            <a:pPr algn="ctr" indent="0" marL="0">
-              <a:buNone/>
-            </a:pPr>
-            <a:r>
-              <a:rPr lang="en-US" sz="1700" b="1" dirty="0">
-                <a:solidFill>
-                  <a:srgbClr val="FFFFFF"/>
-                </a:solidFill>
-                <a:latin typeface="Cambria" pitchFamily="34" charset="0"/>
-                <a:ea typeface="Cambria" pitchFamily="34" charset="-122"/>
-                <a:cs typeface="Cambria" pitchFamily="34" charset="-120"/>
-              </a:rPr>
-              <a:t>a</a:t>
-            </a:r>
-            <a:endParaRPr lang="en-US" sz="1700" dirty="0"/>
-          </a:p>
-        </p:txBody>
-      </p:sp>
-      <p:sp>
-        <p:nvSpPr>
-          <p:cNvPr id="18" name="Text 16"/>
-          <p:cNvSpPr/>
-          <p:nvPr/>
-        </p:nvSpPr>
-        <p:spPr>
-          <a:xfrm>
-            <a:off x="1188720" y="4050792"/>
-            <a:ext cx="4572000" cy="292608"/>
-          </a:xfrm>
-          <a:prstGeom prst="rect">
-            <a:avLst/>
-          </a:prstGeom>
-          <a:noFill/>
-          <a:ln/>
-        </p:spPr>
-        <p:txBody>
-          <a:bodyPr wrap="square" lIns="0" tIns="0" rIns="0" bIns="0" rtlCol="0" anchor="ctr"/>
-          <a:lstStyle/>
-          <a:p>
-            <a:pPr indent="0" marL="0">
-              <a:buNone/>
-            </a:pPr>
-            <a:r>
-              <a:rPr lang="en-US" sz="1450" b="1" dirty="0">
-                <a:solidFill>
-                  <a:srgbClr val="16203F"/>
-                </a:solidFill>
-                <a:latin typeface="Calibri" pitchFamily="34" charset="0"/>
-                <a:ea typeface="Calibri" pitchFamily="34" charset="-122"/>
-                <a:cs typeface="Calibri" pitchFamily="34" charset="-120"/>
-              </a:rPr>
-              <a:t>LLM enrichment</a:t>
-            </a:r>
-            <a:endParaRPr lang="en-US" sz="1450" dirty="0"/>
-          </a:p>
-        </p:txBody>
-      </p:sp>
-      <p:sp>
-        <p:nvSpPr>
-          <p:cNvPr id="19" name="Text 17"/>
-          <p:cNvSpPr/>
-          <p:nvPr/>
-        </p:nvSpPr>
-        <p:spPr>
-          <a:xfrm>
-            <a:off x="1188720" y="4343400"/>
-            <a:ext cx="5852160" cy="310896"/>
-          </a:xfrm>
-          <a:prstGeom prst="rect">
-            <a:avLst/>
-          </a:prstGeom>
-          <a:noFill/>
-          <a:ln/>
-        </p:spPr>
-        <p:txBody>
-          <a:bodyPr wrap="square" lIns="0" tIns="0" rIns="0" bIns="0" rtlCol="0" anchor="ctr"/>
-          <a:lstStyle/>
-          <a:p>
-            <a:pPr indent="0" marL="0">
-              <a:buNone/>
-            </a:pPr>
-            <a:r>
-              <a:rPr lang="en-US" sz="1150" dirty="0">
-                <a:solidFill>
-                  <a:srgbClr val="5A6485"/>
-                </a:solidFill>
-                <a:latin typeface="Calibri" pitchFamily="34" charset="0"/>
-                <a:ea typeface="Calibri" pitchFamily="34" charset="-122"/>
-                <a:cs typeface="Calibri" pitchFamily="34" charset="-120"/>
-              </a:rPr>
-              <a:t>Classify, tag, summarise — output validated against known labels</a:t>
-            </a:r>
-            <a:endParaRPr lang="en-US" sz="1150" dirty="0"/>
-          </a:p>
-        </p:txBody>
-      </p:sp>
-      <p:sp>
-        <p:nvSpPr>
-          <p:cNvPr id="20" name="Shape 18"/>
-          <p:cNvSpPr/>
-          <p:nvPr/>
-        </p:nvSpPr>
-        <p:spPr>
-          <a:xfrm>
-            <a:off x="7498080" y="1783080"/>
-            <a:ext cx="4114800" cy="2286000"/>
-          </a:xfrm>
-          <a:prstGeom prst="roundRect">
-            <a:avLst>
-              <a:gd name="adj" fmla="val 3200"/>
-            </a:avLst>
-          </a:prstGeom>
-          <a:solidFill>
-            <a:srgbClr val="1E2761"/>
-          </a:solidFill>
-          <a:ln w="12700">
-            <a:solidFill>
-              <a:srgbClr val="1E2761"/>
-            </a:solidFill>
-            <a:prstDash val="solid"/>
-          </a:ln>
-        </p:spPr>
-      </p:sp>
-      <p:sp>
-        <p:nvSpPr>
-          <p:cNvPr id="21" name="Text 19"/>
-          <p:cNvSpPr/>
-          <p:nvPr/>
-        </p:nvSpPr>
-        <p:spPr>
-          <a:xfrm>
             <a:off x="7726680" y="1920240"/>
             <a:ext cx="3657600" cy="274320"/>
           </a:xfrm>
@@ -5568,7 +5426,7 @@
       </p:sp>
       <p:sp>
         <p:nvSpPr>
-          <p:cNvPr id="22" name="Text 20"/>
+          <p:cNvPr id="18" name="Text 16"/>
           <p:cNvSpPr/>
           <p:nvPr/>
         </p:nvSpPr>
@@ -5653,7 +5511,7 @@
       </p:sp>
       <p:sp>
         <p:nvSpPr>
-          <p:cNvPr id="23" name="Shape 21"/>
+          <p:cNvPr id="19" name="Shape 17"/>
           <p:cNvSpPr/>
           <p:nvPr/>
         </p:nvSpPr>
@@ -5680,7 +5538,7 @@
       </p:sp>
       <p:sp>
         <p:nvSpPr>
-          <p:cNvPr id="24" name="Text 22"/>
+          <p:cNvPr id="20" name="Text 18"/>
           <p:cNvSpPr/>
           <p:nvPr/>
         </p:nvSpPr>
@@ -5719,7 +5577,7 @@
       </p:sp>
       <p:sp>
         <p:nvSpPr>
-          <p:cNvPr id="25" name="Text 23"/>
+          <p:cNvPr id="21" name="Text 19"/>
           <p:cNvSpPr/>
           <p:nvPr/>
         </p:nvSpPr>

--- a/docs/presentation.pptx
+++ b/docs/presentation.pptx
@@ -2758,7 +2758,7 @@
                 <a:ea typeface="Calibri" pitchFamily="34" charset="-122"/>
                 <a:cs typeface="Calibri" pitchFamily="34" charset="-120"/>
               </a:rPr>
-              <a:t>BIU 8688697201 — Big Data and AI  |  Yael Dorin</a:t>
+              <a:t>BIU 8688697201 — Big Data and AI  |  Yael Cohen, Itay Nuri, Yahel Menachem</a:t>
             </a:r>
             <a:endParaRPr lang="en-US" sz="1200" dirty="0"/>
           </a:p>
